--- a/output/presentation/techflow-issue-72-large-upload.pptx
+++ b/output/presentation/techflow-issue-72-large-upload.pptx
@@ -2,18 +2,18 @@
 <file path=ppt/presentation.xml><?xml version="1.0" encoding="utf-8"?>
 <p:presentation xmlns:p="http://schemas.openxmlformats.org/presentationml/2006/main">
   <p:sldMasterIdLst>
-    <p:sldMasterId xmlns:r="http://schemas.openxmlformats.org/officeDocument/2006/relationships" id="2147483648" r:id="Re06a098976654b1b"/>
+    <p:sldMasterId xmlns:r="http://schemas.openxmlformats.org/officeDocument/2006/relationships" id="2147483648" r:id="Rc801e88471de4e0d"/>
   </p:sldMasterIdLst>
   <p:notesMasterIdLst>
-    <p:notesMasterId xmlns:r="http://schemas.openxmlformats.org/officeDocument/2006/relationships" r:id="R0c4aefedafdf42a5"/>
+    <p:notesMasterId xmlns:r="http://schemas.openxmlformats.org/officeDocument/2006/relationships" r:id="Rb0fc30f86a834a07"/>
   </p:notesMasterIdLst>
   <p:sldIdLst>
-    <p:sldId xmlns:r="http://schemas.openxmlformats.org/officeDocument/2006/relationships" id="256" r:id="Rf13a43a0da454cbd"/>
-    <p:sldId xmlns:r="http://schemas.openxmlformats.org/officeDocument/2006/relationships" id="257" r:id="R1ebaa269188146d6"/>
-    <p:sldId xmlns:r="http://schemas.openxmlformats.org/officeDocument/2006/relationships" id="258" r:id="R3c844e1ce522412b"/>
-    <p:sldId xmlns:r="http://schemas.openxmlformats.org/officeDocument/2006/relationships" id="259" r:id="Rc18251d253dd4580"/>
-    <p:sldId xmlns:r="http://schemas.openxmlformats.org/officeDocument/2006/relationships" id="260" r:id="R7639f7b73f6a42ba"/>
-    <p:sldId xmlns:r="http://schemas.openxmlformats.org/officeDocument/2006/relationships" id="261" r:id="R6818c86770a54c96"/>
+    <p:sldId xmlns:r="http://schemas.openxmlformats.org/officeDocument/2006/relationships" id="256" r:id="Rfea769e4c0dd4aca"/>
+    <p:sldId xmlns:r="http://schemas.openxmlformats.org/officeDocument/2006/relationships" id="257" r:id="R003d92fbcae24c77"/>
+    <p:sldId xmlns:r="http://schemas.openxmlformats.org/officeDocument/2006/relationships" id="258" r:id="Rb25cdbb5d78a41da"/>
+    <p:sldId xmlns:r="http://schemas.openxmlformats.org/officeDocument/2006/relationships" id="259" r:id="Rc5b169dc7a6049be"/>
+    <p:sldId xmlns:r="http://schemas.openxmlformats.org/officeDocument/2006/relationships" id="260" r:id="R40d0d6f8b8f445a3"/>
+    <p:sldId xmlns:r="http://schemas.openxmlformats.org/officeDocument/2006/relationships" id="261" r:id="R51a35981fbe44d16"/>
   </p:sldIdLst>
   <p:sldSz cx="12192000" cy="6858000"/>
   <p:notesSz cx="6858000" cy="9144000"/>
@@ -955,7 +955,7 @@
   </p:cSld>
   <p:clrMap bg1="lt1" tx1="dk1" bg2="lt2" tx2="dk2" accent1="accent1" accent2="accent2" accent3="accent3" accent4="accent4" accent5="accent5" accent6="accent6" hlink="hlink" folHlink="folHlink"/>
   <p:sldLayoutIdLst>
-    <p:sldLayoutId xmlns:r="http://schemas.openxmlformats.org/officeDocument/2006/relationships" id="2147483649" r:id="Rc321bbc9997846a7"/>
+    <p:sldLayoutId xmlns:r="http://schemas.openxmlformats.org/officeDocument/2006/relationships" id="2147483649" r:id="Rcff4689172ba4bb9"/>
   </p:sldLayoutIdLst>
   <p:txStyles>
     <p:titleStyle>
@@ -1506,7 +1506,7 @@
           <p:cNvPr id="7" name="cover-kicker">
             <a:extLst xmlns:a="http://schemas.openxmlformats.org/drawingml/2006/main">
               <a:ext uri="{FF2B5EF4-FFF2-40B4-BE49-F238E27FC236}">
-                <a16:creationId xmlns:a16="http://schemas.microsoft.com/office/drawing/2014/main" id="{41BFFF59-A17B-4344-B672-A7CE1F316567}"/>
+                <a16:creationId xmlns:a16="http://schemas.microsoft.com/office/drawing/2014/main" id="{F0A43814-7BCF-4CA7-8C46-81198BC77C3A}"/>
               </a:ext>
             </a:extLst>
           </p:cNvPr>
@@ -1562,7 +1562,7 @@
           <p:cNvPr id="2" name="cover-title">
             <a:extLst xmlns:a="http://schemas.openxmlformats.org/drawingml/2006/main">
               <a:ext uri="{FF2B5EF4-FFF2-40B4-BE49-F238E27FC236}">
-                <a16:creationId xmlns:a16="http://schemas.microsoft.com/office/drawing/2014/main" id="{EDC155FF-FF7B-4E64-A623-AEAFE41E2938}"/>
+                <a16:creationId xmlns:a16="http://schemas.microsoft.com/office/drawing/2014/main" id="{CCA9C0C5-C970-496C-A73C-1C24EEDB9800}"/>
               </a:ext>
             </a:extLst>
           </p:cNvPr>
@@ -1641,7 +1641,7 @@
           <p:cNvPr id="3" name="cover-subtitle">
             <a:extLst xmlns:a="http://schemas.openxmlformats.org/drawingml/2006/main">
               <a:ext uri="{FF2B5EF4-FFF2-40B4-BE49-F238E27FC236}">
-                <a16:creationId xmlns:a16="http://schemas.microsoft.com/office/drawing/2014/main" id="{D784D507-CF34-4A1B-AA32-0AAF1071BA00}"/>
+                <a16:creationId xmlns:a16="http://schemas.microsoft.com/office/drawing/2014/main" id="{E0228BB2-FDDB-48C8-9BF3-69E537CF7A49}"/>
               </a:ext>
             </a:extLst>
           </p:cNvPr>
@@ -1687,7 +1687,7 @@
                 <a:ea typeface="Malgun Gothic"/>
                 <a:cs typeface="Malgun Gothic"/>
               </a:rPr>
-              <a:t>50 MiB 경계 · 압축 안전검사 · 운영 E2E</a:t>
+              <a:t>실파일 경계 · 디스크 스트리밍 · 운영 검증</a:t>
             </a:r>
           </a:p>
         </p:txBody>
@@ -1697,7 +1697,7 @@
           <p:cNvPr id="4" name="cover-hero">
             <a:extLst xmlns:a="http://schemas.openxmlformats.org/drawingml/2006/main">
               <a:ext uri="{FF2B5EF4-FFF2-40B4-BE49-F238E27FC236}">
-                <a16:creationId xmlns:a16="http://schemas.microsoft.com/office/drawing/2014/main" id="{466209F3-EAA6-4A62-BC0E-21315280ADBF}"/>
+                <a16:creationId xmlns:a16="http://schemas.microsoft.com/office/drawing/2014/main" id="{15D31B52-BECF-4463-92E1-7CE0D0B27EEE}"/>
               </a:ext>
             </a:extLst>
           </p:cNvPr>
@@ -1730,7 +1730,7 @@
           <p:cNvPr id="5" name="cover-stat">
             <a:extLst xmlns:a="http://schemas.openxmlformats.org/drawingml/2006/main">
               <a:ext uri="{FF2B5EF4-FFF2-40B4-BE49-F238E27FC236}">
-                <a16:creationId xmlns:a16="http://schemas.microsoft.com/office/drawing/2014/main" id="{F95EB029-1A3E-4E1D-9BB1-7A3CADF332FF}"/>
+                <a16:creationId xmlns:a16="http://schemas.microsoft.com/office/drawing/2014/main" id="{AEE2B9CE-4838-4A36-A5E5-ED8084952B39}"/>
               </a:ext>
             </a:extLst>
           </p:cNvPr>
@@ -1758,7 +1758,7 @@
           <a:lstStyle xmlns:a="http://schemas.openxmlformats.org/drawingml/2006/main"/>
           <a:p xmlns:a="http://schemas.openxmlformats.org/drawingml/2006/main">
             <a:pPr algn="ctr">
-              <a:defRPr sz="6750" b="1">
+              <a:defRPr sz="6300" b="1">
                 <a:solidFill>
                   <a:srgbClr val="3D8DFF"/>
                 </a:solidFill>
@@ -1768,7 +1768,7 @@
               </a:defRPr>
             </a:pPr>
             <a:r>
-              <a:rPr sz="6750" b="1">
+              <a:rPr sz="6300" b="1">
                 <a:solidFill>
                   <a:srgbClr val="3D8DFF"/>
                 </a:solidFill>
@@ -1776,12 +1776,12 @@
                 <a:ea typeface="Malgun Gothic"/>
                 <a:cs typeface="Malgun Gothic"/>
               </a:rPr>
-              <a:t>50</a:t>
+              <a:t>1 / 10</a:t>
             </a:r>
           </a:p>
           <a:p xmlns:a="http://schemas.openxmlformats.org/drawingml/2006/main">
             <a:pPr algn="ctr">
-              <a:defRPr sz="6750" b="1">
+              <a:defRPr sz="6300" b="1">
                 <a:solidFill>
                   <a:srgbClr val="3D8DFF"/>
                 </a:solidFill>
@@ -1791,7 +1791,7 @@
               </a:defRPr>
             </a:pPr>
             <a:r>
-              <a:rPr sz="6750" b="1">
+              <a:rPr sz="6300" b="1">
                 <a:solidFill>
                   <a:srgbClr val="3D8DFF"/>
                 </a:solidFill>
@@ -1799,7 +1799,7 @@
                 <a:ea typeface="Malgun Gothic"/>
                 <a:cs typeface="Malgun Gothic"/>
               </a:rPr>
-              <a:t>MiB</a:t>
+              <a:t>GiB</a:t>
             </a:r>
           </a:p>
         </p:txBody>
@@ -1809,7 +1809,7 @@
           <p:cNvPr id="6" name="cover-detail">
             <a:extLst xmlns:a="http://schemas.openxmlformats.org/drawingml/2006/main">
               <a:ext uri="{FF2B5EF4-FFF2-40B4-BE49-F238E27FC236}">
-                <a16:creationId xmlns:a16="http://schemas.microsoft.com/office/drawing/2014/main" id="{11A26865-B8C9-4878-B2E9-CB9221BA7CC4}"/>
+                <a16:creationId xmlns:a16="http://schemas.microsoft.com/office/drawing/2014/main" id="{16311986-1FDF-4D75-A0EA-F44A21725482}"/>
               </a:ext>
             </a:extLst>
           </p:cNvPr>
@@ -1855,7 +1855,7 @@
                 <a:ea typeface="Malgun Gothic"/>
                 <a:cs typeface="Malgun Gothic"/>
               </a:rPr>
-              <a:t>파일당 운영 상한</a:t>
+              <a:t>일반 / 압축 파일 상한</a:t>
             </a:r>
           </a:p>
           <a:p xmlns:a="http://schemas.openxmlformats.org/drawingml/2006/main">
@@ -1878,7 +1878,7 @@
                 <a:ea typeface="Malgun Gothic"/>
                 <a:cs typeface="Malgun Gothic"/>
               </a:rPr>
-              <a:t>2026.08.15</a:t>
+              <a:t>2026.08.16</a:t>
             </a:r>
           </a:p>
         </p:txBody>
@@ -1886,7 +1886,7 @@
     </p:spTree>
     <p:extLst>
       <p:ext uri="{BB962C8B-B14F-4D97-AF65-F5344CB8AC3E}">
-        <p14:creationId xmlns:p14="http://schemas.microsoft.com/office/powerpoint/2010/main" val="1036447146"/>
+        <p14:creationId xmlns:p14="http://schemas.microsoft.com/office/powerpoint/2010/main" val="414381246"/>
       </p:ext>
     </p:extLst>
   </p:cSld>
@@ -1910,7 +1910,7 @@
           <p:cNvPr id="21" name="title-2">
             <a:extLst xmlns:a="http://schemas.openxmlformats.org/drawingml/2006/main">
               <a:ext uri="{FF2B5EF4-FFF2-40B4-BE49-F238E27FC236}">
-                <a16:creationId xmlns:a16="http://schemas.microsoft.com/office/drawing/2014/main" id="{842B2D64-8EFE-42AD-936D-028D28F26E40}"/>
+                <a16:creationId xmlns:a16="http://schemas.microsoft.com/office/drawing/2014/main" id="{61550C3D-A799-4AD9-87F8-DABFB50F6091}"/>
               </a:ext>
             </a:extLst>
           </p:cNvPr>
@@ -1956,7 +1956,7 @@
                 <a:ea typeface="Malgun Gothic"/>
                 <a:cs typeface="Malgun Gothic"/>
               </a:rPr>
-              <a:t>하나의 50 MiB 경계가 전 계층을 관통합니다</a:t>
+              <a:t>1 GiB / 10 GiB 정책이 전 계층을 관통합니다</a:t>
             </a:r>
           </a:p>
         </p:txBody>
@@ -1966,7 +1966,7 @@
           <p:cNvPr id="2" name="page-2">
             <a:extLst xmlns:a="http://schemas.openxmlformats.org/drawingml/2006/main">
               <a:ext uri="{FF2B5EF4-FFF2-40B4-BE49-F238E27FC236}">
-                <a16:creationId xmlns:a16="http://schemas.microsoft.com/office/drawing/2014/main" id="{BEC5605B-6541-4BD1-A33D-35974677871F}"/>
+                <a16:creationId xmlns:a16="http://schemas.microsoft.com/office/drawing/2014/main" id="{95E851CE-A0F0-4EDA-B962-4756F38DE590}"/>
               </a:ext>
             </a:extLst>
           </p:cNvPr>
@@ -2022,7 +2022,7 @@
           <p:cNvPr id="3" name="flow-0">
             <a:extLst xmlns:a="http://schemas.openxmlformats.org/drawingml/2006/main">
               <a:ext uri="{FF2B5EF4-FFF2-40B4-BE49-F238E27FC236}">
-                <a16:creationId xmlns:a16="http://schemas.microsoft.com/office/drawing/2014/main" id="{B56E63F8-C09B-40AF-9FC7-9EB0CE6DD503}"/>
+                <a16:creationId xmlns:a16="http://schemas.microsoft.com/office/drawing/2014/main" id="{E3F5D63D-1625-4F67-96EC-C1D42A063C2E}"/>
               </a:ext>
             </a:extLst>
           </p:cNvPr>
@@ -2055,7 +2055,7 @@
           <p:cNvPr id="4" name="flow-text-0">
             <a:extLst xmlns:a="http://schemas.openxmlformats.org/drawingml/2006/main">
               <a:ext uri="{FF2B5EF4-FFF2-40B4-BE49-F238E27FC236}">
-                <a16:creationId xmlns:a16="http://schemas.microsoft.com/office/drawing/2014/main" id="{01023F21-1891-4955-989E-85756A3AA6B1}"/>
+                <a16:creationId xmlns:a16="http://schemas.microsoft.com/office/drawing/2014/main" id="{8EAD867C-AEE9-45AE-A339-CCB4730DEBC1}"/>
               </a:ext>
             </a:extLst>
           </p:cNvPr>
@@ -2124,7 +2124,7 @@
                 <a:ea typeface="Malgun Gothic"/>
                 <a:cs typeface="Malgun Gothic"/>
               </a:rPr>
-              <a:t>120 MiB</a:t>
+              <a:t>11 GiB</a:t>
             </a:r>
           </a:p>
         </p:txBody>
@@ -2134,7 +2134,7 @@
           <p:cNvPr id="5" name="arrow-0">
             <a:extLst xmlns:a="http://schemas.openxmlformats.org/drawingml/2006/main">
               <a:ext uri="{FF2B5EF4-FFF2-40B4-BE49-F238E27FC236}">
-                <a16:creationId xmlns:a16="http://schemas.microsoft.com/office/drawing/2014/main" id="{401207B3-0DD0-4083-A91C-F2A54D16D231}"/>
+                <a16:creationId xmlns:a16="http://schemas.microsoft.com/office/drawing/2014/main" id="{6F5F5CC4-B51D-418C-966D-2B754435C242}"/>
               </a:ext>
             </a:extLst>
           </p:cNvPr>
@@ -2190,7 +2190,7 @@
           <p:cNvPr id="6" name="flow-1">
             <a:extLst xmlns:a="http://schemas.openxmlformats.org/drawingml/2006/main">
               <a:ext uri="{FF2B5EF4-FFF2-40B4-BE49-F238E27FC236}">
-                <a16:creationId xmlns:a16="http://schemas.microsoft.com/office/drawing/2014/main" id="{697C1BE5-DBEE-4932-A85B-472A0B916F32}"/>
+                <a16:creationId xmlns:a16="http://schemas.microsoft.com/office/drawing/2014/main" id="{F402A51C-E53A-423F-86A3-54E51CA3D670}"/>
               </a:ext>
             </a:extLst>
           </p:cNvPr>
@@ -2223,7 +2223,7 @@
           <p:cNvPr id="7" name="flow-text-1">
             <a:extLst xmlns:a="http://schemas.openxmlformats.org/drawingml/2006/main">
               <a:ext uri="{FF2B5EF4-FFF2-40B4-BE49-F238E27FC236}">
-                <a16:creationId xmlns:a16="http://schemas.microsoft.com/office/drawing/2014/main" id="{E70AD678-E167-4AAB-AA59-4C64BFE9BF37}"/>
+                <a16:creationId xmlns:a16="http://schemas.microsoft.com/office/drawing/2014/main" id="{742FF3ED-42D4-4039-9BD3-C5281A35C718}"/>
               </a:ext>
             </a:extLst>
           </p:cNvPr>
@@ -2292,7 +2292,7 @@
                 <a:ea typeface="Malgun Gothic"/>
                 <a:cs typeface="Malgun Gothic"/>
               </a:rPr>
-              <a:t>64 MiB</a:t>
+              <a:t>10 / 11 GiB</a:t>
             </a:r>
           </a:p>
         </p:txBody>
@@ -2302,7 +2302,7 @@
           <p:cNvPr id="8" name="arrow-1">
             <a:extLst xmlns:a="http://schemas.openxmlformats.org/drawingml/2006/main">
               <a:ext uri="{FF2B5EF4-FFF2-40B4-BE49-F238E27FC236}">
-                <a16:creationId xmlns:a16="http://schemas.microsoft.com/office/drawing/2014/main" id="{21313DB2-C3B0-4FC4-9F17-F39EDA28B7A8}"/>
+                <a16:creationId xmlns:a16="http://schemas.microsoft.com/office/drawing/2014/main" id="{E34690F1-8306-46C7-9F98-4BFA91F6369D}"/>
               </a:ext>
             </a:extLst>
           </p:cNvPr>
@@ -2358,7 +2358,7 @@
           <p:cNvPr id="9" name="flow-2">
             <a:extLst xmlns:a="http://schemas.openxmlformats.org/drawingml/2006/main">
               <a:ext uri="{FF2B5EF4-FFF2-40B4-BE49-F238E27FC236}">
-                <a16:creationId xmlns:a16="http://schemas.microsoft.com/office/drawing/2014/main" id="{F775899D-3052-459A-92C0-B90BAD88E9D3}"/>
+                <a16:creationId xmlns:a16="http://schemas.microsoft.com/office/drawing/2014/main" id="{43E4DDA0-5E38-4F29-84EE-E572BFE27D67}"/>
               </a:ext>
             </a:extLst>
           </p:cNvPr>
@@ -2391,7 +2391,7 @@
           <p:cNvPr id="10" name="flow-text-2">
             <a:extLst xmlns:a="http://schemas.openxmlformats.org/drawingml/2006/main">
               <a:ext uri="{FF2B5EF4-FFF2-40B4-BE49-F238E27FC236}">
-                <a16:creationId xmlns:a16="http://schemas.microsoft.com/office/drawing/2014/main" id="{717904DD-5219-4B04-A838-B72130DE4D4A}"/>
+                <a16:creationId xmlns:a16="http://schemas.microsoft.com/office/drawing/2014/main" id="{6EE5B132-7919-4C27-9D17-05F410DA8F80}"/>
               </a:ext>
             </a:extLst>
           </p:cNvPr>
@@ -2437,7 +2437,7 @@
                 <a:ea typeface="Malgun Gothic"/>
                 <a:cs typeface="Malgun Gothic"/>
               </a:rPr>
-              <a:t>FoF Upload</a:t>
+              <a:t>Flarum</a:t>
             </a:r>
           </a:p>
           <a:p xmlns:a="http://schemas.openxmlformats.org/drawingml/2006/main">
@@ -2460,7 +2460,7 @@
                 <a:ea typeface="Malgun Gothic"/>
                 <a:cs typeface="Malgun Gothic"/>
               </a:rPr>
-              <a:t>50 MiB</a:t>
+              <a:t>1 / 10 GiB</a:t>
             </a:r>
           </a:p>
         </p:txBody>
@@ -2470,7 +2470,7 @@
           <p:cNvPr id="11" name="arrow-2">
             <a:extLst xmlns:a="http://schemas.openxmlformats.org/drawingml/2006/main">
               <a:ext uri="{FF2B5EF4-FFF2-40B4-BE49-F238E27FC236}">
-                <a16:creationId xmlns:a16="http://schemas.microsoft.com/office/drawing/2014/main" id="{F2B10F85-C15D-47C1-A501-48BA07341F47}"/>
+                <a16:creationId xmlns:a16="http://schemas.microsoft.com/office/drawing/2014/main" id="{8A7AD7D2-66ED-42B8-8C1F-24E0734441EB}"/>
               </a:ext>
             </a:extLst>
           </p:cNvPr>
@@ -2526,7 +2526,7 @@
           <p:cNvPr id="12" name="flow-3">
             <a:extLst xmlns:a="http://schemas.openxmlformats.org/drawingml/2006/main">
               <a:ext uri="{FF2B5EF4-FFF2-40B4-BE49-F238E27FC236}">
-                <a16:creationId xmlns:a16="http://schemas.microsoft.com/office/drawing/2014/main" id="{BA0D5CFF-9027-455A-ABC0-A01555B88C45}"/>
+                <a16:creationId xmlns:a16="http://schemas.microsoft.com/office/drawing/2014/main" id="{1E93C682-7A03-4317-8E0C-00BBEFD6EA79}"/>
               </a:ext>
             </a:extLst>
           </p:cNvPr>
@@ -2559,7 +2559,7 @@
           <p:cNvPr id="13" name="flow-text-3">
             <a:extLst xmlns:a="http://schemas.openxmlformats.org/drawingml/2006/main">
               <a:ext uri="{FF2B5EF4-FFF2-40B4-BE49-F238E27FC236}">
-                <a16:creationId xmlns:a16="http://schemas.microsoft.com/office/drawing/2014/main" id="{44060206-4081-484B-B458-E8EE072B2553}"/>
+                <a16:creationId xmlns:a16="http://schemas.microsoft.com/office/drawing/2014/main" id="{89C633B4-6225-4486-AE23-671EF176D194}"/>
               </a:ext>
             </a:extLst>
           </p:cNvPr>
@@ -2628,7 +2628,7 @@
                 <a:ea typeface="Malgun Gothic"/>
                 <a:cs typeface="Malgun Gothic"/>
               </a:rPr>
-              <a:t>50 MiB</a:t>
+              <a:t>디스크 저장</a:t>
             </a:r>
           </a:p>
         </p:txBody>
@@ -2638,7 +2638,7 @@
           <p:cNvPr id="14" name="arrow-3">
             <a:extLst xmlns:a="http://schemas.openxmlformats.org/drawingml/2006/main">
               <a:ext uri="{FF2B5EF4-FFF2-40B4-BE49-F238E27FC236}">
-                <a16:creationId xmlns:a16="http://schemas.microsoft.com/office/drawing/2014/main" id="{06F3029C-2603-4D3B-882F-FB6819D5C614}"/>
+                <a16:creationId xmlns:a16="http://schemas.microsoft.com/office/drawing/2014/main" id="{1B29D74C-EB98-42FB-B08F-EAE186139931}"/>
               </a:ext>
             </a:extLst>
           </p:cNvPr>
@@ -2694,7 +2694,7 @@
           <p:cNvPr id="15" name="flow-4">
             <a:extLst xmlns:a="http://schemas.openxmlformats.org/drawingml/2006/main">
               <a:ext uri="{FF2B5EF4-FFF2-40B4-BE49-F238E27FC236}">
-                <a16:creationId xmlns:a16="http://schemas.microsoft.com/office/drawing/2014/main" id="{1F6AADCD-C2F4-4A32-B99E-326C2378BEF5}"/>
+                <a16:creationId xmlns:a16="http://schemas.microsoft.com/office/drawing/2014/main" id="{3B276C91-74C1-428D-A8AA-192D96265252}"/>
               </a:ext>
             </a:extLst>
           </p:cNvPr>
@@ -2727,7 +2727,7 @@
           <p:cNvPr id="16" name="flow-text-4">
             <a:extLst xmlns:a="http://schemas.openxmlformats.org/drawingml/2006/main">
               <a:ext uri="{FF2B5EF4-FFF2-40B4-BE49-F238E27FC236}">
-                <a16:creationId xmlns:a16="http://schemas.microsoft.com/office/drawing/2014/main" id="{B674E241-F640-4AEA-8509-8AA9B0E83BC7}"/>
+                <a16:creationId xmlns:a16="http://schemas.microsoft.com/office/drawing/2014/main" id="{A434F82E-5A03-4350-987A-BAFE48CE1E99}"/>
               </a:ext>
             </a:extLst>
           </p:cNvPr>
@@ -2796,7 +2796,7 @@
                 <a:ea typeface="Malgun Gothic"/>
                 <a:cs typeface="Malgun Gothic"/>
               </a:rPr>
-              <a:t>50 MiB</a:t>
+              <a:t>스트리밍</a:t>
             </a:r>
           </a:p>
         </p:txBody>
@@ -2806,7 +2806,7 @@
           <p:cNvPr id="17" name="arrow-4">
             <a:extLst xmlns:a="http://schemas.openxmlformats.org/drawingml/2006/main">
               <a:ext uri="{FF2B5EF4-FFF2-40B4-BE49-F238E27FC236}">
-                <a16:creationId xmlns:a16="http://schemas.microsoft.com/office/drawing/2014/main" id="{1DFFC05A-619A-44C9-AFFE-A4693B8B9F3B}"/>
+                <a16:creationId xmlns:a16="http://schemas.microsoft.com/office/drawing/2014/main" id="{F8681958-BB8D-41B9-AC38-4C118978BF8E}"/>
               </a:ext>
             </a:extLst>
           </p:cNvPr>
@@ -2862,7 +2862,7 @@
           <p:cNvPr id="18" name="flow-5">
             <a:extLst xmlns:a="http://schemas.openxmlformats.org/drawingml/2006/main">
               <a:ext uri="{FF2B5EF4-FFF2-40B4-BE49-F238E27FC236}">
-                <a16:creationId xmlns:a16="http://schemas.microsoft.com/office/drawing/2014/main" id="{3DFD9661-6195-4620-B66E-F5B35F635238}"/>
+                <a16:creationId xmlns:a16="http://schemas.microsoft.com/office/drawing/2014/main" id="{2587C831-40E6-4426-82E1-B1C90C1981A0}"/>
               </a:ext>
             </a:extLst>
           </p:cNvPr>
@@ -2895,7 +2895,7 @@
           <p:cNvPr id="19" name="flow-text-5">
             <a:extLst xmlns:a="http://schemas.openxmlformats.org/drawingml/2006/main">
               <a:ext uri="{FF2B5EF4-FFF2-40B4-BE49-F238E27FC236}">
-                <a16:creationId xmlns:a16="http://schemas.microsoft.com/office/drawing/2014/main" id="{03EFE40B-DAA0-49CB-B3CF-03FCB284C261}"/>
+                <a16:creationId xmlns:a16="http://schemas.microsoft.com/office/drawing/2014/main" id="{6315CE1C-8BAB-4BA9-86AA-779B8A839420}"/>
               </a:ext>
             </a:extLst>
           </p:cNvPr>
@@ -2964,7 +2964,7 @@
                 <a:ea typeface="Malgun Gothic"/>
                 <a:cs typeface="Malgun Gothic"/>
               </a:rPr>
-              <a:t>100 MiB</a:t>
+              <a:t>100 GiB</a:t>
             </a:r>
           </a:p>
         </p:txBody>
@@ -2974,7 +2974,7 @@
           <p:cNvPr id="20" name="flow-foot">
             <a:extLst xmlns:a="http://schemas.openxmlformats.org/drawingml/2006/main">
               <a:ext uri="{FF2B5EF4-FFF2-40B4-BE49-F238E27FC236}">
-                <a16:creationId xmlns:a16="http://schemas.microsoft.com/office/drawing/2014/main" id="{154C1392-A052-4F9B-BE8E-BFBCE0C9F9CB}"/>
+                <a16:creationId xmlns:a16="http://schemas.microsoft.com/office/drawing/2014/main" id="{0294D793-C875-4369-AE63-F21BFF87E792}"/>
               </a:ext>
             </a:extLst>
           </p:cNvPr>
@@ -3020,7 +3020,7 @@
                 <a:ea typeface="Malgun Gothic"/>
                 <a:cs typeface="Malgun Gothic"/>
               </a:rPr>
-              <a:t>다운로드 120초 · 일시 오류 2회 재시도 · 100개 항목 · 압축비 20배 · 24시간 보관</a:t>
+              <a:t>7,200초 · 2회 재시도 · 100개 항목 · 압축비 20배 · AI에는 정규화 근거만 전달</a:t>
             </a:r>
           </a:p>
         </p:txBody>
@@ -3028,7 +3028,7 @@
     </p:spTree>
     <p:extLst>
       <p:ext uri="{BB962C8B-B14F-4D97-AF65-F5344CB8AC3E}">
-        <p14:creationId xmlns:p14="http://schemas.microsoft.com/office/powerpoint/2010/main" val="1193939621"/>
+        <p14:creationId xmlns:p14="http://schemas.microsoft.com/office/powerpoint/2010/main" val="865525968"/>
       </p:ext>
     </p:extLst>
   </p:cSld>
@@ -3052,7 +3052,7 @@
           <p:cNvPr id="4" name="title-3">
             <a:extLst xmlns:a="http://schemas.openxmlformats.org/drawingml/2006/main">
               <a:ext uri="{FF2B5EF4-FFF2-40B4-BE49-F238E27FC236}">
-                <a16:creationId xmlns:a16="http://schemas.microsoft.com/office/drawing/2014/main" id="{AA41419E-B7C9-4F4E-B9EC-14781C25A3BC}"/>
+                <a16:creationId xmlns:a16="http://schemas.microsoft.com/office/drawing/2014/main" id="{735FFDD5-0F7A-4C41-8354-07646AF344E6}"/>
               </a:ext>
             </a:extLst>
           </p:cNvPr>
@@ -3098,7 +3098,7 @@
                 <a:ea typeface="Malgun Gothic"/>
                 <a:cs typeface="Malgun Gothic"/>
               </a:rPr>
-              <a:t>병목은 10 MiB에서 50 MiB로 이동했습니다</a:t>
+              <a:t>수신·분석 경계를 함께 확장했습니다</a:t>
             </a:r>
           </a:p>
         </p:txBody>
@@ -3108,7 +3108,7 @@
           <p:cNvPr id="2" name="page-3">
             <a:extLst xmlns:a="http://schemas.openxmlformats.org/drawingml/2006/main">
               <a:ext uri="{FF2B5EF4-FFF2-40B4-BE49-F238E27FC236}">
-                <a16:creationId xmlns:a16="http://schemas.microsoft.com/office/drawing/2014/main" id="{44E10634-128F-4E14-8CE4-48124B31AB7D}"/>
+                <a16:creationId xmlns:a16="http://schemas.microsoft.com/office/drawing/2014/main" id="{0259FCDD-0369-4877-A64C-9B4269EFE3D7}"/>
               </a:ext>
             </a:extLst>
           </p:cNvPr>
@@ -3267,7 +3267,7 @@
                           <a:ea typeface="Malgun Gothic"/>
                           <a:cs typeface="Malgun Gothic"/>
                         </a:rPr>
-                        <a:t>FoF Upload</a:t>
+                        <a:t>Nginx</a:t>
                       </a:r>
                     </a:p>
                   </a:txBody>
@@ -3291,7 +3291,7 @@
                           <a:ea typeface="Malgun Gothic"/>
                           <a:cs typeface="Malgun Gothic"/>
                         </a:rPr>
-                        <a:t>10 MiB</a:t>
+                        <a:t>120 MiB</a:t>
                       </a:r>
                     </a:p>
                   </a:txBody>
@@ -3315,7 +3315,7 @@
                           <a:ea typeface="Malgun Gothic"/>
                           <a:cs typeface="Malgun Gothic"/>
                         </a:rPr>
-                        <a:t>50 MiB</a:t>
+                        <a:t>11 GiB · 7,200초</a:t>
                       </a:r>
                     </a:p>
                   </a:txBody>
@@ -3365,7 +3365,7 @@
                           <a:ea typeface="Malgun Gothic"/>
                           <a:cs typeface="Malgun Gothic"/>
                         </a:rPr>
-                        <a:t>120 MiB · 30/60초 · 128 MiB</a:t>
+                        <a:t>120 / 120 MiB</a:t>
                       </a:r>
                     </a:p>
                   </a:txBody>
@@ -3389,7 +3389,7 @@
                           <a:ea typeface="Malgun Gothic"/>
                           <a:cs typeface="Malgun Gothic"/>
                         </a:rPr>
-                        <a:t>64 MiB · 300/300초 · 256 MiB</a:t>
+                        <a:t>파일 10 / 요청 11 GiB</a:t>
                       </a:r>
                     </a:p>
                   </a:txBody>
@@ -3415,7 +3415,7 @@
                           <a:ea typeface="Malgun Gothic"/>
                           <a:cs typeface="Malgun Gothic"/>
                         </a:rPr>
-                        <a:t>Poller</a:t>
+                        <a:t>Flarum</a:t>
                       </a:r>
                     </a:p>
                   </a:txBody>
@@ -3439,7 +3439,7 @@
                           <a:ea typeface="Malgun Gothic"/>
                           <a:cs typeface="Malgun Gothic"/>
                         </a:rPr>
-                        <a:t>10 MiB · 30초 · 재시도 없음</a:t>
+                        <a:t>50 MiB</a:t>
                       </a:r>
                     </a:p>
                   </a:txBody>
@@ -3463,7 +3463,7 @@
                           <a:ea typeface="Malgun Gothic"/>
                           <a:cs typeface="Malgun Gothic"/>
                         </a:rPr>
-                        <a:t>50 MiB · 120초 · 2회</a:t>
+                        <a:t>일반 1 / 압축 10 GiB</a:t>
                       </a:r>
                     </a:p>
                   </a:txBody>
@@ -3489,7 +3489,7 @@
                           <a:ea typeface="Malgun Gothic"/>
                           <a:cs typeface="Malgun Gothic"/>
                         </a:rPr>
-                        <a:t>Gateway</a:t>
+                        <a:t>Poller</a:t>
                       </a:r>
                     </a:p>
                   </a:txBody>
@@ -3513,7 +3513,7 @@
                           <a:ea typeface="Malgun Gothic"/>
                           <a:cs typeface="Malgun Gothic"/>
                         </a:rPr>
-                        <a:t>원본 10 / 해제 20 MiB</a:t>
+                        <a:t>50 MiB · 120초</a:t>
                       </a:r>
                     </a:p>
                   </a:txBody>
@@ -3537,7 +3537,7 @@
                           <a:ea typeface="Malgun Gothic"/>
                           <a:cs typeface="Malgun Gothic"/>
                         </a:rPr>
-                        <a:t>원본 50 / 해제 100 MiB</a:t>
+                        <a:t>1 / 10 GiB · 7,200초</a:t>
                       </a:r>
                     </a:p>
                   </a:txBody>
@@ -3563,7 +3563,7 @@
                           <a:ea typeface="Malgun Gothic"/>
                           <a:cs typeface="Malgun Gothic"/>
                         </a:rPr>
-                        <a:t>유지관리</a:t>
+                        <a:t>Gateway</a:t>
                       </a:r>
                     </a:p>
                   </a:txBody>
@@ -3587,7 +3587,7 @@
                           <a:ea typeface="Malgun Gothic"/>
                           <a:cs typeface="Malgun Gothic"/>
                         </a:rPr>
-                        <a:t>수동</a:t>
+                        <a:t>원본 50 / 해제 100 MiB</a:t>
                       </a:r>
                     </a:p>
                   </a:txBody>
@@ -3611,7 +3611,7 @@
                           <a:ea typeface="Malgun Gothic"/>
                           <a:cs typeface="Malgun Gothic"/>
                         </a:rPr>
-                        <a:t>15분 · 24시간 · 70%/85%</a:t>
+                        <a:t>원본 1/10 · 해제 100 GiB</a:t>
                       </a:r>
                     </a:p>
                   </a:txBody>
@@ -3629,7 +3629,7 @@
     </p:spTree>
     <p:extLst>
       <p:ext uri="{BB962C8B-B14F-4D97-AF65-F5344CB8AC3E}">
-        <p14:creationId xmlns:p14="http://schemas.microsoft.com/office/powerpoint/2010/main" val="57983731"/>
+        <p14:creationId xmlns:p14="http://schemas.microsoft.com/office/powerpoint/2010/main" val="1736245911"/>
       </p:ext>
     </p:extLst>
   </p:cSld>
@@ -3653,7 +3653,7 @@
           <p:cNvPr id="13" name="title-4">
             <a:extLst xmlns:a="http://schemas.openxmlformats.org/drawingml/2006/main">
               <a:ext uri="{FF2B5EF4-FFF2-40B4-BE49-F238E27FC236}">
-                <a16:creationId xmlns:a16="http://schemas.microsoft.com/office/drawing/2014/main" id="{48E0C9A9-AD69-4425-A6C4-8A803C215613}"/>
+                <a16:creationId xmlns:a16="http://schemas.microsoft.com/office/drawing/2014/main" id="{7C0F619E-378E-4337-BC87-F9769331C3FB}"/>
               </a:ext>
             </a:extLst>
           </p:cNvPr>
@@ -3699,7 +3699,7 @@
                 <a:ea typeface="Malgun Gothic"/>
                 <a:cs typeface="Malgun Gothic"/>
               </a:rPr>
-              <a:t>운영 검증은 코드, 경계, 실제 대화를 모두 통과했습니다</a:t>
+              <a:t>정확한 경계 크기로 운영 경로를 검증했습니다</a:t>
             </a:r>
           </a:p>
         </p:txBody>
@@ -3709,7 +3709,7 @@
           <p:cNvPr id="2" name="page-4">
             <a:extLst xmlns:a="http://schemas.openxmlformats.org/drawingml/2006/main">
               <a:ext uri="{FF2B5EF4-FFF2-40B4-BE49-F238E27FC236}">
-                <a16:creationId xmlns:a16="http://schemas.microsoft.com/office/drawing/2014/main" id="{3B4B9F12-E0D1-459C-8516-4F990A1C7B3B}"/>
+                <a16:creationId xmlns:a16="http://schemas.microsoft.com/office/drawing/2014/main" id="{C0D650B9-85C0-4D9F-A305-AFF86F4FAA62}"/>
               </a:ext>
             </a:extLst>
           </p:cNvPr>
@@ -3765,7 +3765,7 @@
           <p:cNvPr id="3" name="metric-0">
             <a:extLst xmlns:a="http://schemas.openxmlformats.org/drawingml/2006/main">
               <a:ext uri="{FF2B5EF4-FFF2-40B4-BE49-F238E27FC236}">
-                <a16:creationId xmlns:a16="http://schemas.microsoft.com/office/drawing/2014/main" id="{5B3763E3-63E1-402B-915E-F68F21C047BF}"/>
+                <a16:creationId xmlns:a16="http://schemas.microsoft.com/office/drawing/2014/main" id="{A71DD1E5-512D-4F52-BD87-E1F74DA8EFAB}"/>
               </a:ext>
             </a:extLst>
           </p:cNvPr>
@@ -3798,7 +3798,7 @@
           <p:cNvPr id="4" name="metric-value-0">
             <a:extLst xmlns:a="http://schemas.openxmlformats.org/drawingml/2006/main">
               <a:ext uri="{FF2B5EF4-FFF2-40B4-BE49-F238E27FC236}">
-                <a16:creationId xmlns:a16="http://schemas.microsoft.com/office/drawing/2014/main" id="{6C7C0348-BEB6-4ADA-A0D9-90CA79F6FAD0}"/>
+                <a16:creationId xmlns:a16="http://schemas.microsoft.com/office/drawing/2014/main" id="{E9844A68-C278-4920-881E-AC5D0D298596}"/>
               </a:ext>
             </a:extLst>
           </p:cNvPr>
@@ -3844,7 +3844,7 @@
                 <a:ea typeface="Malgun Gothic"/>
                 <a:cs typeface="Malgun Gothic"/>
               </a:rPr>
-              <a:t>259/259</a:t>
+              <a:t>263/263</a:t>
             </a:r>
           </a:p>
         </p:txBody>
@@ -3854,7 +3854,7 @@
           <p:cNvPr id="5" name="metric-detail-0">
             <a:extLst xmlns:a="http://schemas.openxmlformats.org/drawingml/2006/main">
               <a:ext uri="{FF2B5EF4-FFF2-40B4-BE49-F238E27FC236}">
-                <a16:creationId xmlns:a16="http://schemas.microsoft.com/office/drawing/2014/main" id="{E3BAEA15-8888-41F4-BB06-EF63842FB0B6}"/>
+                <a16:creationId xmlns:a16="http://schemas.microsoft.com/office/drawing/2014/main" id="{0A6CB387-5EAC-41BE-8697-45EEFB750810}"/>
               </a:ext>
             </a:extLst>
           </p:cNvPr>
@@ -3910,7 +3910,7 @@
           <p:cNvPr id="6" name="metric-1">
             <a:extLst xmlns:a="http://schemas.openxmlformats.org/drawingml/2006/main">
               <a:ext uri="{FF2B5EF4-FFF2-40B4-BE49-F238E27FC236}">
-                <a16:creationId xmlns:a16="http://schemas.microsoft.com/office/drawing/2014/main" id="{163C3223-68D7-468E-A140-CD7D2306E201}"/>
+                <a16:creationId xmlns:a16="http://schemas.microsoft.com/office/drawing/2014/main" id="{7462B0CA-A467-4A1B-AE45-BC1DBB02C263}"/>
               </a:ext>
             </a:extLst>
           </p:cNvPr>
@@ -3943,7 +3943,7 @@
           <p:cNvPr id="7" name="metric-value-1">
             <a:extLst xmlns:a="http://schemas.openxmlformats.org/drawingml/2006/main">
               <a:ext uri="{FF2B5EF4-FFF2-40B4-BE49-F238E27FC236}">
-                <a16:creationId xmlns:a16="http://schemas.microsoft.com/office/drawing/2014/main" id="{28D32B3D-415F-4734-A930-1E0B9CFC02D7}"/>
+                <a16:creationId xmlns:a16="http://schemas.microsoft.com/office/drawing/2014/main" id="{02811BF9-0A5E-4A1F-B41F-553BEA955319}"/>
               </a:ext>
             </a:extLst>
           </p:cNvPr>
@@ -3989,7 +3989,7 @@
                 <a:ea typeface="Malgun Gothic"/>
                 <a:cs typeface="Malgun Gothic"/>
               </a:rPr>
-              <a:t>50 MiB</a:t>
+              <a:t>1 / 10 GiB</a:t>
             </a:r>
           </a:p>
         </p:txBody>
@@ -3999,7 +3999,7 @@
           <p:cNvPr id="8" name="metric-detail-1">
             <a:extLst xmlns:a="http://schemas.openxmlformats.org/drawingml/2006/main">
               <a:ext uri="{FF2B5EF4-FFF2-40B4-BE49-F238E27FC236}">
-                <a16:creationId xmlns:a16="http://schemas.microsoft.com/office/drawing/2014/main" id="{BF0FF1B6-8EEF-4243-95E3-2BB590AA0CF0}"/>
+                <a16:creationId xmlns:a16="http://schemas.microsoft.com/office/drawing/2014/main" id="{B531ED51-6CD4-4A05-BE91-F4D7F1C343F5}"/>
               </a:ext>
             </a:extLst>
           </p:cNvPr>
@@ -4055,7 +4055,7 @@
           <p:cNvPr id="9" name="metric-2">
             <a:extLst xmlns:a="http://schemas.openxmlformats.org/drawingml/2006/main">
               <a:ext uri="{FF2B5EF4-FFF2-40B4-BE49-F238E27FC236}">
-                <a16:creationId xmlns:a16="http://schemas.microsoft.com/office/drawing/2014/main" id="{71B47724-54B0-413A-911F-81B80B708821}"/>
+                <a16:creationId xmlns:a16="http://schemas.microsoft.com/office/drawing/2014/main" id="{294D1AB9-DDF3-4BA7-B1F6-F06343E0E766}"/>
               </a:ext>
             </a:extLst>
           </p:cNvPr>
@@ -4088,7 +4088,7 @@
           <p:cNvPr id="10" name="metric-value-2">
             <a:extLst xmlns:a="http://schemas.openxmlformats.org/drawingml/2006/main">
               <a:ext uri="{FF2B5EF4-FFF2-40B4-BE49-F238E27FC236}">
-                <a16:creationId xmlns:a16="http://schemas.microsoft.com/office/drawing/2014/main" id="{A4AF9091-7DE1-470B-85AA-1BAE3A5E5768}"/>
+                <a16:creationId xmlns:a16="http://schemas.microsoft.com/office/drawing/2014/main" id="{08742173-53F4-4C9F-8B90-CF84A3793FF0}"/>
               </a:ext>
             </a:extLst>
           </p:cNvPr>
@@ -4134,7 +4134,7 @@
                 <a:ea typeface="Malgun Gothic"/>
                 <a:cs typeface="Malgun Gothic"/>
               </a:rPr>
-              <a:t>4종</a:t>
+              <a:t>60.3 MiB</a:t>
             </a:r>
           </a:p>
         </p:txBody>
@@ -4144,7 +4144,7 @@
           <p:cNvPr id="11" name="metric-detail-2">
             <a:extLst xmlns:a="http://schemas.openxmlformats.org/drawingml/2006/main">
               <a:ext uri="{FF2B5EF4-FFF2-40B4-BE49-F238E27FC236}">
-                <a16:creationId xmlns:a16="http://schemas.microsoft.com/office/drawing/2014/main" id="{02E97EEC-0B7D-47D8-B09D-AE2B8BC206EB}"/>
+                <a16:creationId xmlns:a16="http://schemas.microsoft.com/office/drawing/2014/main" id="{CD7C4816-0BB9-46A9-B74F-FEDAB27FFB71}"/>
               </a:ext>
             </a:extLst>
           </p:cNvPr>
@@ -4190,7 +4190,7 @@
                 <a:ea typeface="Malgun Gothic"/>
                 <a:cs typeface="Malgun Gothic"/>
               </a:rPr>
-              <a:t>로그 · ZIP · GZIP · TAR.GZ</a:t>
+              <a:t>10 GiB 분석 최대 메모리</a:t>
             </a:r>
           </a:p>
         </p:txBody>
@@ -4200,7 +4200,7 @@
           <p:cNvPr id="12" name="metric-caption">
             <a:extLst xmlns:a="http://schemas.openxmlformats.org/drawingml/2006/main">
               <a:ext uri="{FF2B5EF4-FFF2-40B4-BE49-F238E27FC236}">
-                <a16:creationId xmlns:a16="http://schemas.microsoft.com/office/drawing/2014/main" id="{73902419-023F-4EED-BC2D-C58F738B1D7A}"/>
+                <a16:creationId xmlns:a16="http://schemas.microsoft.com/office/drawing/2014/main" id="{DE327FE8-EFBF-47ED-90F0-AB27CBC4D20B}"/>
               </a:ext>
             </a:extLst>
           </p:cNvPr>
@@ -4246,7 +4246,7 @@
                 <a:ea typeface="Malgun Gothic"/>
                 <a:cs typeface="Malgun Gothic"/>
               </a:rPr>
-              <a:t>Discussion #172: Artifact 4개 수집 · AI 답변 자동 게시 · 시험 데이터 영구 삭제</a:t>
+              <a:t>Flarum 1 GiB 16초 · 10 GiB 410초 | Gateway 1 GiB 27.751초 · 10 GiB 294.814초</a:t>
             </a:r>
           </a:p>
         </p:txBody>
@@ -4254,7 +4254,7 @@
     </p:spTree>
     <p:extLst>
       <p:ext uri="{BB962C8B-B14F-4D97-AF65-F5344CB8AC3E}">
-        <p14:creationId xmlns:p14="http://schemas.microsoft.com/office/powerpoint/2010/main" val="276658088"/>
+        <p14:creationId xmlns:p14="http://schemas.microsoft.com/office/powerpoint/2010/main" val="687429879"/>
       </p:ext>
     </p:extLst>
   </p:cSld>
@@ -4278,7 +4278,7 @@
           <p:cNvPr id="7" name="title-5">
             <a:extLst xmlns:a="http://schemas.openxmlformats.org/drawingml/2006/main">
               <a:ext uri="{FF2B5EF4-FFF2-40B4-BE49-F238E27FC236}">
-                <a16:creationId xmlns:a16="http://schemas.microsoft.com/office/drawing/2014/main" id="{DA40B5C2-8272-42AF-8036-5B09FC728691}"/>
+                <a16:creationId xmlns:a16="http://schemas.microsoft.com/office/drawing/2014/main" id="{9716B59B-5EE5-4056-A1F7-A8F3F0609CFA}"/>
               </a:ext>
             </a:extLst>
           </p:cNvPr>
@@ -4334,7 +4334,7 @@
           <p:cNvPr id="2" name="page-5">
             <a:extLst xmlns:a="http://schemas.openxmlformats.org/drawingml/2006/main">
               <a:ext uri="{FF2B5EF4-FFF2-40B4-BE49-F238E27FC236}">
-                <a16:creationId xmlns:a16="http://schemas.microsoft.com/office/drawing/2014/main" id="{C21544C9-286E-423F-BB0C-977EC40D3404}"/>
+                <a16:creationId xmlns:a16="http://schemas.microsoft.com/office/drawing/2014/main" id="{1D37A3F6-61C2-4F04-8212-69FBF1DD3413}"/>
               </a:ext>
             </a:extLst>
           </p:cNvPr>
@@ -4857,7 +4857,7 @@
           <p:cNvPr id="4" name="security-side">
             <a:extLst xmlns:a="http://schemas.openxmlformats.org/drawingml/2006/main">
               <a:ext uri="{FF2B5EF4-FFF2-40B4-BE49-F238E27FC236}">
-                <a16:creationId xmlns:a16="http://schemas.microsoft.com/office/drawing/2014/main" id="{40E0FF5B-E065-4A3C-B934-4FA3B2F73860}"/>
+                <a16:creationId xmlns:a16="http://schemas.microsoft.com/office/drawing/2014/main" id="{123C96E4-4C6C-487F-918D-78325D17AEEA}"/>
               </a:ext>
             </a:extLst>
           </p:cNvPr>
@@ -4890,7 +4890,7 @@
           <p:cNvPr id="5" name="security-side-title">
             <a:extLst xmlns:a="http://schemas.openxmlformats.org/drawingml/2006/main">
               <a:ext uri="{FF2B5EF4-FFF2-40B4-BE49-F238E27FC236}">
-                <a16:creationId xmlns:a16="http://schemas.microsoft.com/office/drawing/2014/main" id="{A0680A1A-7A46-4666-B327-27E8BAEA5D68}"/>
+                <a16:creationId xmlns:a16="http://schemas.microsoft.com/office/drawing/2014/main" id="{939BB669-17E5-4F86-8AFC-FD641B98D181}"/>
               </a:ext>
             </a:extLst>
           </p:cNvPr>
@@ -4936,7 +4936,7 @@
                 <a:ea typeface="Malgun Gothic"/>
                 <a:cs typeface="Malgun Gothic"/>
               </a:rPr>
-              <a:t>운영 안전망</a:t>
+              <a:t>검증 후 정리</a:t>
             </a:r>
           </a:p>
         </p:txBody>
@@ -4946,7 +4946,7 @@
           <p:cNvPr id="6" name="security-side-body">
             <a:extLst xmlns:a="http://schemas.openxmlformats.org/drawingml/2006/main">
               <a:ext uri="{FF2B5EF4-FFF2-40B4-BE49-F238E27FC236}">
-                <a16:creationId xmlns:a16="http://schemas.microsoft.com/office/drawing/2014/main" id="{4ECF4380-3A1A-453C-B733-62CC98BDF4C3}"/>
+                <a16:creationId xmlns:a16="http://schemas.microsoft.com/office/drawing/2014/main" id="{97263E06-5C0A-40F9-B1CC-C42236B6FA86}"/>
               </a:ext>
             </a:extLst>
           </p:cNvPr>
@@ -4974,7 +4974,7 @@
           <a:lstStyle xmlns:a="http://schemas.openxmlformats.org/drawingml/2006/main"/>
           <a:p xmlns:a="http://schemas.openxmlformats.org/drawingml/2006/main">
             <a:pPr algn="l">
-              <a:defRPr sz="1875" b="0">
+              <a:defRPr sz="1800" b="0">
                 <a:solidFill>
                   <a:srgbClr val="101010"/>
                 </a:solidFill>
@@ -4984,7 +4984,7 @@
               </a:defRPr>
             </a:pPr>
             <a:r>
-              <a:rPr sz="1875" b="0">
+              <a:rPr sz="1800" b="0">
                 <a:solidFill>
                   <a:srgbClr val="101010"/>
                 </a:solidFill>
@@ -4992,12 +4992,12 @@
                 <a:ea typeface="Malgun Gothic"/>
                 <a:cs typeface="Malgun Gothic"/>
               </a:rPr>
-              <a:t>24시간 만료 삭제</a:t>
+              <a:t>Flarum 첨부 2건 삭제</a:t>
             </a:r>
           </a:p>
           <a:p xmlns:a="http://schemas.openxmlformats.org/drawingml/2006/main">
             <a:pPr algn="l">
-              <a:defRPr sz="1875" b="0">
+              <a:defRPr sz="1800" b="0">
                 <a:solidFill>
                   <a:srgbClr val="101010"/>
                 </a:solidFill>
@@ -5007,7 +5007,7 @@
               </a:defRPr>
             </a:pPr>
             <a:r>
-              <a:rPr sz="1875" b="0">
+              <a:rPr sz="1800" b="0">
                 <a:solidFill>
                   <a:srgbClr val="101010"/>
                 </a:solidFill>
@@ -5015,12 +5015,12 @@
                 <a:ea typeface="Malgun Gothic"/>
                 <a:cs typeface="Malgun Gothic"/>
               </a:rPr>
-              <a:t>15분 주기 점검</a:t>
+              <a:t>Gateway Artifact 2건 삭제</a:t>
             </a:r>
           </a:p>
           <a:p xmlns:a="http://schemas.openxmlformats.org/drawingml/2006/main">
             <a:pPr algn="l">
-              <a:defRPr sz="1875" b="0">
+              <a:defRPr sz="1800" b="0">
                 <a:solidFill>
                   <a:srgbClr val="101010"/>
                 </a:solidFill>
@@ -5030,7 +5030,7 @@
               </a:defRPr>
             </a:pPr>
             <a:r>
-              <a:rPr sz="1875" b="0">
+              <a:rPr sz="1800" b="0">
                 <a:solidFill>
                   <a:srgbClr val="101010"/>
                 </a:solidFill>
@@ -5038,12 +5038,12 @@
                 <a:ea typeface="Malgun Gothic"/>
                 <a:cs typeface="Malgun Gothic"/>
               </a:rPr>
-              <a:t>70% 경고</a:t>
+              <a:t>시험 컨테이너 6개 삭제</a:t>
             </a:r>
           </a:p>
           <a:p xmlns:a="http://schemas.openxmlformats.org/drawingml/2006/main">
             <a:pPr algn="l">
-              <a:defRPr sz="1875" b="0">
+              <a:defRPr sz="1800" b="0">
                 <a:solidFill>
                   <a:srgbClr val="101010"/>
                 </a:solidFill>
@@ -5053,7 +5053,7 @@
               </a:defRPr>
             </a:pPr>
             <a:r>
-              <a:rPr sz="1875" b="0">
+              <a:rPr sz="1800" b="0">
                 <a:solidFill>
                   <a:srgbClr val="101010"/>
                 </a:solidFill>
@@ -5061,7 +5061,7 @@
                 <a:ea typeface="Malgun Gothic"/>
                 <a:cs typeface="Malgun Gothic"/>
               </a:rPr>
-              <a:t>85% 위험</a:t>
+              <a:t>시험 볼륨 7개 삭제</a:t>
             </a:r>
           </a:p>
           <a:p xmlns:a="http://schemas.openxmlformats.org/drawingml/2006/main">
@@ -5071,7 +5071,7 @@
           </a:p>
           <a:p xmlns:a="http://schemas.openxmlformats.org/drawingml/2006/main">
             <a:pPr algn="l">
-              <a:defRPr sz="1875" b="0">
+              <a:defRPr sz="1800" b="0">
                 <a:solidFill>
                   <a:srgbClr val="101010"/>
                 </a:solidFill>
@@ -5081,7 +5081,7 @@
               </a:defRPr>
             </a:pPr>
             <a:r>
-              <a:rPr sz="1875" b="0">
+              <a:rPr sz="1800" b="0">
                 <a:solidFill>
                   <a:srgbClr val="101010"/>
                 </a:solidFill>
@@ -5089,12 +5089,12 @@
                 <a:ea typeface="Malgun Gothic"/>
                 <a:cs typeface="Malgun Gothic"/>
               </a:rPr>
-              <a:t>최초 실행에서</a:t>
+              <a:t>DB·파일 잔존</a:t>
             </a:r>
           </a:p>
           <a:p xmlns:a="http://schemas.openxmlformats.org/drawingml/2006/main">
             <a:pPr algn="l">
-              <a:defRPr sz="1875" b="0">
+              <a:defRPr sz="1800" b="0">
                 <a:solidFill>
                   <a:srgbClr val="101010"/>
                 </a:solidFill>
@@ -5104,7 +5104,7 @@
               </a:defRPr>
             </a:pPr>
             <a:r>
-              <a:rPr sz="1875" b="0">
+              <a:rPr sz="1800" b="0">
                 <a:solidFill>
                   <a:srgbClr val="101010"/>
                 </a:solidFill>
@@ -5112,7 +5112,7 @@
                 <a:ea typeface="Malgun Gothic"/>
                 <a:cs typeface="Malgun Gothic"/>
               </a:rPr>
-              <a:t>만료 28개 정리</a:t>
+              <a:t>0건</a:t>
             </a:r>
           </a:p>
         </p:txBody>
@@ -5120,7 +5120,7 @@
     </p:spTree>
     <p:extLst>
       <p:ext uri="{BB962C8B-B14F-4D97-AF65-F5344CB8AC3E}">
-        <p14:creationId xmlns:p14="http://schemas.microsoft.com/office/powerpoint/2010/main" val="1462272391"/>
+        <p14:creationId xmlns:p14="http://schemas.microsoft.com/office/powerpoint/2010/main" val="1553887013"/>
       </p:ext>
     </p:extLst>
   </p:cSld>
@@ -5151,7 +5151,7 @@
           <p:cNvPr id="6" name="close-kicker">
             <a:extLst xmlns:a="http://schemas.openxmlformats.org/drawingml/2006/main">
               <a:ext uri="{FF2B5EF4-FFF2-40B4-BE49-F238E27FC236}">
-                <a16:creationId xmlns:a16="http://schemas.microsoft.com/office/drawing/2014/main" id="{B78BEFC8-A9C1-41C4-8138-D046A916FD39}"/>
+                <a16:creationId xmlns:a16="http://schemas.microsoft.com/office/drawing/2014/main" id="{52A6891F-4DFE-4EFD-871E-9EF5D5CCDD59}"/>
               </a:ext>
             </a:extLst>
           </p:cNvPr>
@@ -5207,7 +5207,7 @@
           <p:cNvPr id="2" name="close-title">
             <a:extLst xmlns:a="http://schemas.openxmlformats.org/drawingml/2006/main">
               <a:ext uri="{FF2B5EF4-FFF2-40B4-BE49-F238E27FC236}">
-                <a16:creationId xmlns:a16="http://schemas.microsoft.com/office/drawing/2014/main" id="{3397D947-8DB0-4EF9-9C05-88CD8A39CF87}"/>
+                <a16:creationId xmlns:a16="http://schemas.microsoft.com/office/drawing/2014/main" id="{89B838F0-0081-4CE5-B907-313C44D6A214}"/>
               </a:ext>
             </a:extLst>
           </p:cNvPr>
@@ -5286,7 +5286,7 @@
           <p:cNvPr id="3" name="close-detail">
             <a:extLst xmlns:a="http://schemas.openxmlformats.org/drawingml/2006/main">
               <a:ext uri="{FF2B5EF4-FFF2-40B4-BE49-F238E27FC236}">
-                <a16:creationId xmlns:a16="http://schemas.microsoft.com/office/drawing/2014/main" id="{1807AD39-82DC-4776-965F-655543AEB37C}"/>
+                <a16:creationId xmlns:a16="http://schemas.microsoft.com/office/drawing/2014/main" id="{5CA84CBB-D7CB-408E-814D-4D2B2C79A331}"/>
               </a:ext>
             </a:extLst>
           </p:cNvPr>
@@ -5298,7 +5298,7 @@
         <p:spPr>
           <a:xfrm xmlns:a="http://schemas.openxmlformats.org/drawingml/2006/main">
             <a:off x="400050" y="4619625"/>
-            <a:ext cx="7239000" cy="809625"/>
+            <a:ext cx="7620000" cy="809625"/>
           </a:xfrm>
           <a:prstGeom xmlns:a="http://schemas.openxmlformats.org/drawingml/2006/main" prst="rect">
             <a:avLst/>
@@ -5332,7 +5332,7 @@
                 <a:ea typeface="Malgun Gothic"/>
                 <a:cs typeface="Malgun Gothic"/>
               </a:rPr>
-              <a:t>Gateway healthy · Poller running · Maintainer running</a:t>
+              <a:t>Gateway healthy · Poller failed=0 · Maintainer level=ok</a:t>
             </a:r>
           </a:p>
           <a:p xmlns:a="http://schemas.openxmlformats.org/drawingml/2006/main">
@@ -5365,7 +5365,7 @@
           <p:cNvPr id="4" name="close-badge">
             <a:extLst xmlns:a="http://schemas.openxmlformats.org/drawingml/2006/main">
               <a:ext uri="{FF2B5EF4-FFF2-40B4-BE49-F238E27FC236}">
-                <a16:creationId xmlns:a16="http://schemas.microsoft.com/office/drawing/2014/main" id="{93AC4C03-B17A-4E6D-978A-BA29BB62D7FA}"/>
+                <a16:creationId xmlns:a16="http://schemas.microsoft.com/office/drawing/2014/main" id="{7E30D0D0-F500-4A36-A484-16DDF3FA3FDB}"/>
               </a:ext>
             </a:extLst>
           </p:cNvPr>
@@ -5398,7 +5398,7 @@
           <p:cNvPr id="5" name="close-go">
             <a:extLst xmlns:a="http://schemas.openxmlformats.org/drawingml/2006/main">
               <a:ext uri="{FF2B5EF4-FFF2-40B4-BE49-F238E27FC236}">
-                <a16:creationId xmlns:a16="http://schemas.microsoft.com/office/drawing/2014/main" id="{782F79C6-366E-42DE-8F7A-2CA825CB8629}"/>
+                <a16:creationId xmlns:a16="http://schemas.microsoft.com/office/drawing/2014/main" id="{85A83336-913F-4CAA-83F8-3395D82FA595}"/>
               </a:ext>
             </a:extLst>
           </p:cNvPr>
@@ -5452,7 +5452,7 @@
     </p:spTree>
     <p:extLst>
       <p:ext uri="{BB962C8B-B14F-4D97-AF65-F5344CB8AC3E}">
-        <p14:creationId xmlns:p14="http://schemas.microsoft.com/office/powerpoint/2010/main" val="898890469"/>
+        <p14:creationId xmlns:p14="http://schemas.microsoft.com/office/powerpoint/2010/main" val="69008608"/>
       </p:ext>
     </p:extLst>
   </p:cSld>
